--- a/Customer Churn Prediction & Lifetime Value Analytics Platform.pptx
+++ b/Customer Churn Prediction & Lifetime Value Analytics Platform.pptx
@@ -19,8 +19,9 @@
     <p:sldId id="267" r:id="rId13"/>
     <p:sldId id="268" r:id="rId14"/>
     <p:sldId id="269" r:id="rId15"/>
-    <p:sldId id="270" r:id="rId16"/>
-    <p:sldId id="271" r:id="rId17"/>
+    <p:sldId id="272" r:id="rId16"/>
+    <p:sldId id="270" r:id="rId17"/>
+    <p:sldId id="271" r:id="rId18"/>
   </p:sldIdLst>
   <p:sldSz cx="9144000" cy="6858000" type="screen4x3"/>
   <p:notesSz cx="6858000" cy="9144000"/>
@@ -257,7 +258,7 @@
             <a:fld id="{479B210A-7F51-4F67-9E37-B15D5C292BB4}" type="datetimeFigureOut">
               <a:rPr lang="en-US" smtClean="0"/>
               <a:pPr/>
-              <a:t>6/9/2026</a:t>
+              <a:t>6/26/2026</a:t>
             </a:fld>
             <a:endParaRPr lang="en-US"/>
           </a:p>
@@ -572,7 +573,7 @@
             <a:fld id="{479B210A-7F51-4F67-9E37-B15D5C292BB4}" type="datetimeFigureOut">
               <a:rPr lang="en-US" smtClean="0"/>
               <a:pPr/>
-              <a:t>6/9/2026</a:t>
+              <a:t>6/26/2026</a:t>
             </a:fld>
             <a:endParaRPr lang="en-US"/>
           </a:p>
@@ -759,7 +760,7 @@
             <a:fld id="{479B210A-7F51-4F67-9E37-B15D5C292BB4}" type="datetimeFigureOut">
               <a:rPr lang="en-US" smtClean="0"/>
               <a:pPr/>
-              <a:t>6/9/2026</a:t>
+              <a:t>6/26/2026</a:t>
             </a:fld>
             <a:endParaRPr lang="en-US"/>
           </a:p>
@@ -936,7 +937,7 @@
             <a:fld id="{479B210A-7F51-4F67-9E37-B15D5C292BB4}" type="datetimeFigureOut">
               <a:rPr lang="en-US" smtClean="0"/>
               <a:pPr/>
-              <a:t>6/9/2026</a:t>
+              <a:t>6/26/2026</a:t>
             </a:fld>
             <a:endParaRPr lang="en-US"/>
           </a:p>
@@ -1206,7 +1207,7 @@
             <a:fld id="{479B210A-7F51-4F67-9E37-B15D5C292BB4}" type="datetimeFigureOut">
               <a:rPr lang="en-US" smtClean="0"/>
               <a:pPr/>
-              <a:t>6/9/2026</a:t>
+              <a:t>6/26/2026</a:t>
             </a:fld>
             <a:endParaRPr lang="en-US"/>
           </a:p>
@@ -1676,7 +1677,7 @@
             <a:fld id="{479B210A-7F51-4F67-9E37-B15D5C292BB4}" type="datetimeFigureOut">
               <a:rPr lang="en-US" smtClean="0"/>
               <a:pPr/>
-              <a:t>6/9/2026</a:t>
+              <a:t>6/26/2026</a:t>
             </a:fld>
             <a:endParaRPr lang="en-US"/>
           </a:p>
@@ -2167,7 +2168,7 @@
             <a:fld id="{479B210A-7F51-4F67-9E37-B15D5C292BB4}" type="datetimeFigureOut">
               <a:rPr lang="en-US" smtClean="0"/>
               <a:pPr/>
-              <a:t>6/9/2026</a:t>
+              <a:t>6/26/2026</a:t>
             </a:fld>
             <a:endParaRPr lang="en-US"/>
           </a:p>
@@ -2295,7 +2296,7 @@
             <a:fld id="{479B210A-7F51-4F67-9E37-B15D5C292BB4}" type="datetimeFigureOut">
               <a:rPr lang="en-US" smtClean="0"/>
               <a:pPr/>
-              <a:t>6/9/2026</a:t>
+              <a:t>6/26/2026</a:t>
             </a:fld>
             <a:endParaRPr lang="en-US"/>
           </a:p>
@@ -2441,7 +2442,7 @@
             <a:fld id="{479B210A-7F51-4F67-9E37-B15D5C292BB4}" type="datetimeFigureOut">
               <a:rPr lang="en-US" smtClean="0"/>
               <a:pPr/>
-              <a:t>6/9/2026</a:t>
+              <a:t>6/26/2026</a:t>
             </a:fld>
             <a:endParaRPr lang="en-US"/>
           </a:p>
@@ -2765,7 +2766,7 @@
             <a:fld id="{479B210A-7F51-4F67-9E37-B15D5C292BB4}" type="datetimeFigureOut">
               <a:rPr lang="en-US" smtClean="0"/>
               <a:pPr/>
-              <a:t>6/9/2026</a:t>
+              <a:t>6/26/2026</a:t>
             </a:fld>
             <a:endParaRPr lang="en-US"/>
           </a:p>
@@ -2901,7 +2902,7 @@
             <a:fld id="{479B210A-7F51-4F67-9E37-B15D5C292BB4}" type="datetimeFigureOut">
               <a:rPr lang="en-US" smtClean="0"/>
               <a:pPr/>
-              <a:t>6/9/2026</a:t>
+              <a:t>6/26/2026</a:t>
             </a:fld>
             <a:endParaRPr lang="en-US"/>
           </a:p>
@@ -3684,7 +3685,7 @@
             <a:fld id="{479B210A-7F51-4F67-9E37-B15D5C292BB4}" type="datetimeFigureOut">
               <a:rPr lang="en-US" smtClean="0"/>
               <a:pPr/>
-              <a:t>6/9/2026</a:t>
+              <a:t>6/26/2026</a:t>
             </a:fld>
             <a:endParaRPr lang="en-US"/>
           </a:p>
@@ -5847,6 +5848,132 @@
           </a:p>
         </p:txBody>
       </p:sp>
+      <p:pic>
+        <p:nvPicPr>
+          <p:cNvPr id="4" name="Picture 3" descr="01_API_Response.png"/>
+          <p:cNvPicPr>
+            <a:picLocks noChangeAspect="1"/>
+          </p:cNvPicPr>
+          <p:nvPr/>
+        </p:nvPicPr>
+        <p:blipFill>
+          <a:blip r:embed="rId2" cstate="print"/>
+          <a:stretch>
+            <a:fillRect/>
+          </a:stretch>
+        </p:blipFill>
+        <p:spPr>
+          <a:xfrm>
+            <a:off x="5410200" y="1676400"/>
+            <a:ext cx="3421402" cy="1371600"/>
+          </a:xfrm>
+          <a:prstGeom prst="rect">
+            <a:avLst/>
+          </a:prstGeom>
+          <a:solidFill>
+            <a:schemeClr val="accent5">
+              <a:lumMod val="40000"/>
+              <a:lumOff val="60000"/>
+            </a:schemeClr>
+          </a:solidFill>
+          <a:ln w="19050">
+            <a:solidFill>
+              <a:schemeClr val="tx1"/>
+            </a:solidFill>
+          </a:ln>
+          <a:scene3d>
+            <a:camera prst="orthographicFront"/>
+            <a:lightRig rig="threePt" dir="t"/>
+          </a:scene3d>
+          <a:sp3d>
+            <a:bevelT/>
+          </a:sp3d>
+        </p:spPr>
+      </p:pic>
+      <p:pic>
+        <p:nvPicPr>
+          <p:cNvPr id="5" name="Picture 4" descr="02_Swagger_Home.png"/>
+          <p:cNvPicPr>
+            <a:picLocks noChangeAspect="1"/>
+          </p:cNvPicPr>
+          <p:nvPr/>
+        </p:nvPicPr>
+        <p:blipFill>
+          <a:blip r:embed="rId3" cstate="print"/>
+          <a:stretch>
+            <a:fillRect/>
+          </a:stretch>
+        </p:blipFill>
+        <p:spPr>
+          <a:xfrm>
+            <a:off x="5410200" y="3048000"/>
+            <a:ext cx="3429000" cy="1393588"/>
+          </a:xfrm>
+          <a:prstGeom prst="rect">
+            <a:avLst/>
+          </a:prstGeom>
+          <a:solidFill>
+            <a:schemeClr val="accent5">
+              <a:lumMod val="40000"/>
+              <a:lumOff val="60000"/>
+            </a:schemeClr>
+          </a:solidFill>
+          <a:ln w="19050">
+            <a:solidFill>
+              <a:schemeClr val="tx1"/>
+            </a:solidFill>
+          </a:ln>
+          <a:scene3d>
+            <a:camera prst="orthographicFront"/>
+            <a:lightRig rig="threePt" dir="t"/>
+          </a:scene3d>
+          <a:sp3d>
+            <a:bevelT/>
+          </a:sp3d>
+        </p:spPr>
+      </p:pic>
+      <p:pic>
+        <p:nvPicPr>
+          <p:cNvPr id="6" name="Picture 5" descr="03_predict_endpoint_Response-1.png"/>
+          <p:cNvPicPr>
+            <a:picLocks noChangeAspect="1"/>
+          </p:cNvPicPr>
+          <p:nvPr/>
+        </p:nvPicPr>
+        <p:blipFill>
+          <a:blip r:embed="rId4" cstate="print"/>
+          <a:stretch>
+            <a:fillRect/>
+          </a:stretch>
+        </p:blipFill>
+        <p:spPr>
+          <a:xfrm>
+            <a:off x="5410201" y="4343400"/>
+            <a:ext cx="3429000" cy="1447800"/>
+          </a:xfrm>
+          <a:prstGeom prst="rect">
+            <a:avLst/>
+          </a:prstGeom>
+          <a:solidFill>
+            <a:schemeClr val="accent5">
+              <a:lumMod val="40000"/>
+              <a:lumOff val="60000"/>
+            </a:schemeClr>
+          </a:solidFill>
+          <a:ln w="19050">
+            <a:solidFill>
+              <a:schemeClr val="tx1"/>
+            </a:solidFill>
+          </a:ln>
+          <a:scene3d>
+            <a:camera prst="orthographicFront"/>
+            <a:lightRig rig="threePt" dir="t"/>
+          </a:scene3d>
+          <a:sp3d>
+            <a:bevelT/>
+          </a:sp3d>
+        </p:spPr>
+      </p:pic>
     </p:spTree>
   </p:cSld>
   <p:clrMapOvr>
@@ -5856,6 +5983,222 @@
 </file>
 
 <file path=ppt/slides/slide15.xml><?xml version="1.0" encoding="utf-8"?>
+<p:sld xmlns:a="http://schemas.openxmlformats.org/drawingml/2006/main" xmlns:r="http://schemas.openxmlformats.org/officeDocument/2006/relationships" xmlns:p="http://schemas.openxmlformats.org/presentationml/2006/main">
+  <p:cSld>
+    <p:spTree>
+      <p:nvGrpSpPr>
+        <p:cNvPr id="1" name=""/>
+        <p:cNvGrpSpPr/>
+        <p:nvPr/>
+      </p:nvGrpSpPr>
+      <p:grpSpPr>
+        <a:xfrm>
+          <a:off x="0" y="0"/>
+          <a:ext cx="0" cy="0"/>
+          <a:chOff x="0" y="0"/>
+          <a:chExt cx="0" cy="0"/>
+        </a:xfrm>
+      </p:grpSpPr>
+      <p:sp>
+        <p:nvSpPr>
+          <p:cNvPr id="2" name="Title 1"/>
+          <p:cNvSpPr>
+            <a:spLocks noGrp="1"/>
+          </p:cNvSpPr>
+          <p:nvPr>
+            <p:ph type="title"/>
+          </p:nvPr>
+        </p:nvSpPr>
+        <p:spPr>
+          <a:solidFill>
+            <a:schemeClr val="bg2">
+              <a:lumMod val="25000"/>
+            </a:schemeClr>
+          </a:solidFill>
+          <a:ln w="38100">
+            <a:solidFill>
+              <a:srgbClr val="FF0000"/>
+            </a:solidFill>
+          </a:ln>
+          <a:scene3d>
+            <a:camera prst="orthographicFront"/>
+            <a:lightRig rig="threePt" dir="t"/>
+          </a:scene3d>
+          <a:sp3d>
+            <a:bevelT/>
+          </a:sp3d>
+        </p:spPr>
+        <p:style>
+          <a:lnRef idx="2">
+            <a:schemeClr val="accent6">
+              <a:shade val="50000"/>
+            </a:schemeClr>
+          </a:lnRef>
+          <a:fillRef idx="1">
+            <a:schemeClr val="accent6"/>
+          </a:fillRef>
+          <a:effectRef idx="0">
+            <a:schemeClr val="accent6"/>
+          </a:effectRef>
+          <a:fontRef idx="minor">
+            <a:schemeClr val="lt1"/>
+          </a:fontRef>
+        </p:style>
+        <p:txBody>
+          <a:bodyPr anchor="ctr">
+            <a:normAutofit fontScale="90000"/>
+          </a:bodyPr>
+          <a:lstStyle/>
+          <a:p>
+            <a:pPr algn="ctr"/>
+            <a:r>
+              <a:rPr lang="en-US" sz="3900" dirty="0" smtClean="0">
+                <a:solidFill>
+                  <a:schemeClr val="lt1"/>
+                </a:solidFill>
+                <a:latin typeface="+mn-lt"/>
+                <a:ea typeface="+mn-ea"/>
+                <a:cs typeface="+mn-cs"/>
+              </a:rPr>
+              <a:t>API DEPLOYMENT WITH DOCKER</a:t>
+            </a:r>
+          </a:p>
+        </p:txBody>
+      </p:sp>
+      <p:pic>
+        <p:nvPicPr>
+          <p:cNvPr id="4" name="Content Placeholder 3" descr="05_Docker_Deployment.png"/>
+          <p:cNvPicPr>
+            <a:picLocks noGrp="1" noChangeAspect="1"/>
+          </p:cNvPicPr>
+          <p:nvPr>
+            <p:ph idx="1"/>
+          </p:nvPr>
+        </p:nvPicPr>
+        <p:blipFill>
+          <a:blip r:embed="rId2"/>
+          <a:stretch>
+            <a:fillRect/>
+          </a:stretch>
+        </p:blipFill>
+        <p:spPr>
+          <a:xfrm>
+            <a:off x="1447800" y="1447800"/>
+            <a:ext cx="7467600" cy="1524000"/>
+          </a:xfrm>
+          <a:solidFill>
+            <a:schemeClr val="accent5">
+              <a:lumMod val="40000"/>
+              <a:lumOff val="60000"/>
+            </a:schemeClr>
+          </a:solidFill>
+          <a:ln w="19050">
+            <a:solidFill>
+              <a:schemeClr val="tx1"/>
+            </a:solidFill>
+          </a:ln>
+          <a:scene3d>
+            <a:camera prst="orthographicFront"/>
+            <a:lightRig rig="threePt" dir="t"/>
+          </a:scene3d>
+          <a:sp3d>
+            <a:bevelT/>
+          </a:sp3d>
+        </p:spPr>
+      </p:pic>
+      <p:pic>
+        <p:nvPicPr>
+          <p:cNvPr id="5" name="Picture 4" descr="06_DockerHub_Image_Pushed.png"/>
+          <p:cNvPicPr>
+            <a:picLocks noChangeAspect="1"/>
+          </p:cNvPicPr>
+          <p:nvPr/>
+        </p:nvPicPr>
+        <p:blipFill>
+          <a:blip r:embed="rId3"/>
+          <a:stretch>
+            <a:fillRect/>
+          </a:stretch>
+        </p:blipFill>
+        <p:spPr>
+          <a:xfrm>
+            <a:off x="1447800" y="2971801"/>
+            <a:ext cx="7467600" cy="1524000"/>
+          </a:xfrm>
+          <a:prstGeom prst="rect">
+            <a:avLst/>
+          </a:prstGeom>
+          <a:solidFill>
+            <a:schemeClr val="accent5">
+              <a:lumMod val="40000"/>
+              <a:lumOff val="60000"/>
+            </a:schemeClr>
+          </a:solidFill>
+          <a:ln w="19050">
+            <a:solidFill>
+              <a:schemeClr val="tx1"/>
+            </a:solidFill>
+          </a:ln>
+          <a:scene3d>
+            <a:camera prst="orthographicFront"/>
+            <a:lightRig rig="threePt" dir="t"/>
+          </a:scene3d>
+          <a:sp3d>
+            <a:bevelT/>
+          </a:sp3d>
+        </p:spPr>
+      </p:pic>
+      <p:pic>
+        <p:nvPicPr>
+          <p:cNvPr id="6" name="Picture 5" descr="07_DockerHub_Repository.png"/>
+          <p:cNvPicPr>
+            <a:picLocks noChangeAspect="1"/>
+          </p:cNvPicPr>
+          <p:nvPr/>
+        </p:nvPicPr>
+        <p:blipFill>
+          <a:blip r:embed="rId4"/>
+          <a:stretch>
+            <a:fillRect/>
+          </a:stretch>
+        </p:blipFill>
+        <p:spPr>
+          <a:xfrm>
+            <a:off x="1447800" y="4509888"/>
+            <a:ext cx="7467600" cy="2191572"/>
+          </a:xfrm>
+          <a:prstGeom prst="rect">
+            <a:avLst/>
+          </a:prstGeom>
+          <a:solidFill>
+            <a:schemeClr val="accent5">
+              <a:lumMod val="40000"/>
+              <a:lumOff val="60000"/>
+            </a:schemeClr>
+          </a:solidFill>
+          <a:ln w="19050">
+            <a:solidFill>
+              <a:schemeClr val="tx1"/>
+            </a:solidFill>
+          </a:ln>
+          <a:scene3d>
+            <a:camera prst="orthographicFront"/>
+            <a:lightRig rig="threePt" dir="t"/>
+          </a:scene3d>
+          <a:sp3d>
+            <a:bevelT/>
+          </a:sp3d>
+        </p:spPr>
+      </p:pic>
+    </p:spTree>
+  </p:cSld>
+  <p:clrMapOvr>
+    <a:masterClrMapping/>
+  </p:clrMapOvr>
+</p:sld>
+</file>
+
+<file path=ppt/slides/slide16.xml><?xml version="1.0" encoding="utf-8"?>
 <p:sld xmlns:a="http://schemas.openxmlformats.org/drawingml/2006/main" xmlns:r="http://schemas.openxmlformats.org/officeDocument/2006/relationships" xmlns:p="http://schemas.openxmlformats.org/presentationml/2006/main">
   <p:cSld>
     <p:spTree>
@@ -6162,7 +6505,7 @@
 </p:sld>
 </file>
 
-<file path=ppt/slides/slide16.xml><?xml version="1.0" encoding="utf-8"?>
+<file path=ppt/slides/slide17.xml><?xml version="1.0" encoding="utf-8"?>
 <p:sld xmlns:a="http://schemas.openxmlformats.org/drawingml/2006/main" xmlns:r="http://schemas.openxmlformats.org/officeDocument/2006/relationships" xmlns:p="http://schemas.openxmlformats.org/presentationml/2006/main">
   <p:cSld>
     <p:spTree>
@@ -6246,14 +6589,6 @@
               </a:rPr>
               <a:t>THANKYOU</a:t>
             </a:r>
-            <a:endParaRPr lang="en-US" sz="7200" dirty="0" smtClean="0">
-              <a:solidFill>
-                <a:schemeClr val="lt1"/>
-              </a:solidFill>
-              <a:latin typeface="+mn-lt"/>
-              <a:ea typeface="+mn-ea"/>
-              <a:cs typeface="+mn-cs"/>
-            </a:endParaRPr>
           </a:p>
         </p:txBody>
       </p:sp>
